--- a/dist/초3/국어/문학과매체/초3_국어_문학과매체_03_매체에서정보찾기_학생용.pptx
+++ b/dist/초3/국어/문학과매체/초3_국어_문학과매체_03_매체에서정보찾기_학생용.pptx
@@ -120,20 +120,20 @@
   <p:extLst>
     <p:ext uri="{521415D9-36F7-43E2-AB2F-B90AF26B5E84}">
       <p14:sectionLst xmlns:p14="http://schemas.microsoft.com/office/powerpoint/2010/main">
-        <p14:section name="도입" id="{d49c268f-8c4d-9c9a-ab16-e7e9490c9654}">
+        <p14:section name="도입" id="{4a4b57ff-e341-32a7-87ca-889ec79c7f2c}">
           <p14:sldIdLst>
             <p14:sldId id="256"/>
             <p14:sldId id="257"/>
           </p14:sldIdLst>
         </p14:section>
-        <p14:section name="개념" id="{914e0cd1-2f8f-bd00-ac72-69ccaccc208b}">
+        <p14:section name="개념" id="{d2528382-ac50-a7f8-518c-4e1f8650fe96}">
           <p14:sldIdLst>
             <p14:sldId id="258"/>
             <p14:sldId id="259"/>
             <p14:sldId id="260"/>
           </p14:sldIdLst>
         </p14:section>
-        <p14:section name="연습" id="{25ff6a60-e649-6588-e085-dee09edab866}">
+        <p14:section name="연습" id="{48f8ad65-4506-77c1-a1c8-3cec594a326a}">
           <p14:sldIdLst>
             <p14:sldId id="261"/>
             <p14:sldId id="262"/>
@@ -142,18 +142,18 @@
             <p14:sldId id="265"/>
           </p14:sldIdLst>
         </p14:section>
-        <p14:section name="확인" id="{6e87c40d-8d39-95a2-e632-e9de4197c4ff}">
+        <p14:section name="확인" id="{6a166f80-709c-2f10-82a6-746b1af5ab31}">
           <p14:sldIdLst>
             <p14:sldId id="266"/>
             <p14:sldId id="267"/>
           </p14:sldIdLst>
         </p14:section>
-        <p14:section name="정리" id="{5c6c4afb-149f-8fb6-775a-5a4eefbc8040}">
+        <p14:section name="정리" id="{1dd5ab51-7f18-cb04-3a9c-df82043131da}">
           <p14:sldIdLst>
             <p14:sldId id="268"/>
           </p14:sldIdLst>
         </p14:section>
-        <p14:section name="보충" id="{f1e1db2d-2711-5e61-5392-d9d70a8ec7d7}">
+        <p14:section name="보충" id="{d52edb35-3974-7a25-4c51-ed9aec05d0e1}">
           <p14:sldIdLst>
             <p14:sldId id="269"/>
           </p14:sldIdLst>
@@ -3090,7 +3090,7 @@
           </p:nvPr>
         </p:nvGraphicFramePr>
         <p:xfrm>
-          <a:off x="6581394" y="2651760"/>
+          <a:off x="6581394" y="2697480"/>
           <a:ext cx="4754880" cy="914400"/>
         </p:xfrm>
         <a:graphic>
@@ -3101,7 +3101,7 @@
                 <a:gridCol w="1521562"/>
                 <a:gridCol w="3233318"/>
               </a:tblGrid>
-              <a:tr h="487680">
+              <a:tr h="472440">
                 <a:tc>
                   <a:txBody>
                     <a:bodyPr/>
@@ -3239,7 +3239,7 @@
                   </a:tcPr>
                 </a:tc>
               </a:tr>
-              <a:tr h="487680">
+              <a:tr h="472440">
                 <a:tc>
                   <a:txBody>
                     <a:bodyPr/>
@@ -3377,7 +3377,7 @@
                   </a:tcPr>
                 </a:tc>
               </a:tr>
-              <a:tr h="487680">
+              <a:tr h="472440">
                 <a:tc>
                   <a:txBody>
                     <a:bodyPr/>
@@ -3515,7 +3515,7 @@
                   </a:tcPr>
                 </a:tc>
               </a:tr>
-              <a:tr h="487680">
+              <a:tr h="472440">
                 <a:tc>
                   <a:txBody>
                     <a:bodyPr/>
@@ -3653,7 +3653,7 @@
                   </a:tcPr>
                 </a:tc>
               </a:tr>
-              <a:tr h="487680">
+              <a:tr h="472440">
                 <a:tc>
                   <a:txBody>
                     <a:bodyPr/>
@@ -3791,7 +3791,7 @@
                   </a:tcPr>
                 </a:tc>
               </a:tr>
-              <a:tr h="487680">
+              <a:tr h="472440">
                 <a:tc>
                   <a:txBody>
                     <a:bodyPr/>
@@ -4376,7 +4376,7 @@
           </p:nvPr>
         </p:nvGraphicFramePr>
         <p:xfrm>
-          <a:off x="6398514" y="2895600"/>
+          <a:off x="6398514" y="2933700"/>
           <a:ext cx="5120640" cy="914400"/>
         </p:xfrm>
         <a:graphic>
@@ -4387,7 +4387,7 @@
                 <a:gridCol w="1843430"/>
                 <a:gridCol w="3277210"/>
               </a:tblGrid>
-              <a:tr h="487680">
+              <a:tr h="472440">
                 <a:tc>
                   <a:txBody>
                     <a:bodyPr/>
@@ -4525,7 +4525,7 @@
                   </a:tcPr>
                 </a:tc>
               </a:tr>
-              <a:tr h="487680">
+              <a:tr h="472440">
                 <a:tc>
                   <a:txBody>
                     <a:bodyPr/>
@@ -4684,7 +4684,7 @@
                   </a:tcPr>
                 </a:tc>
               </a:tr>
-              <a:tr h="487680">
+              <a:tr h="472440">
                 <a:tc>
                   <a:txBody>
                     <a:bodyPr/>
@@ -4822,7 +4822,7 @@
                   </a:tcPr>
                 </a:tc>
               </a:tr>
-              <a:tr h="487680">
+              <a:tr h="472440">
                 <a:tc>
                   <a:txBody>
                     <a:bodyPr/>
@@ -4960,7 +4960,7 @@
                   </a:tcPr>
                 </a:tc>
               </a:tr>
-              <a:tr h="487680">
+              <a:tr h="472440">
                 <a:tc>
                   <a:txBody>
                     <a:bodyPr/>
@@ -5528,7 +5528,7 @@
           </p:nvPr>
         </p:nvGraphicFramePr>
         <p:xfrm>
-          <a:off x="6581394" y="2651760"/>
+          <a:off x="6581394" y="2697480"/>
           <a:ext cx="4754880" cy="914400"/>
         </p:xfrm>
         <a:graphic>
@@ -5539,7 +5539,7 @@
                 <a:gridCol w="1521562"/>
                 <a:gridCol w="3233318"/>
               </a:tblGrid>
-              <a:tr h="487680">
+              <a:tr h="472440">
                 <a:tc>
                   <a:txBody>
                     <a:bodyPr/>
@@ -5677,7 +5677,7 @@
                   </a:tcPr>
                 </a:tc>
               </a:tr>
-              <a:tr h="487680">
+              <a:tr h="472440">
                 <a:tc>
                   <a:txBody>
                     <a:bodyPr/>
@@ -5815,7 +5815,7 @@
                   </a:tcPr>
                 </a:tc>
               </a:tr>
-              <a:tr h="487680">
+              <a:tr h="472440">
                 <a:tc>
                   <a:txBody>
                     <a:bodyPr/>
@@ -5953,7 +5953,7 @@
                   </a:tcPr>
                 </a:tc>
               </a:tr>
-              <a:tr h="487680">
+              <a:tr h="472440">
                 <a:tc>
                   <a:txBody>
                     <a:bodyPr/>
@@ -6091,7 +6091,7 @@
                   </a:tcPr>
                 </a:tc>
               </a:tr>
-              <a:tr h="487680">
+              <a:tr h="472440">
                 <a:tc>
                   <a:txBody>
                     <a:bodyPr/>
@@ -6229,7 +6229,7 @@
                   </a:tcPr>
                 </a:tc>
               </a:tr>
-              <a:tr h="487680">
+              <a:tr h="472440">
                 <a:tc>
                   <a:txBody>
                     <a:bodyPr/>
@@ -8085,7 +8085,7 @@
           </p:nvPr>
         </p:nvGraphicFramePr>
         <p:xfrm>
-          <a:off x="1065276" y="2245360"/>
+          <a:off x="1065276" y="2286635"/>
           <a:ext cx="10058400" cy="914400"/>
         </p:xfrm>
         <a:graphic>
@@ -8096,7 +8096,7 @@
                 <a:gridCol w="2212848"/>
                 <a:gridCol w="7845552"/>
               </a:tblGrid>
-              <a:tr h="528320">
+              <a:tr h="511810">
                 <a:tc>
                   <a:txBody>
                     <a:bodyPr/>
@@ -8234,7 +8234,7 @@
                   </a:tcPr>
                 </a:tc>
               </a:tr>
-              <a:tr h="528320">
+              <a:tr h="511810">
                 <a:tc>
                   <a:txBody>
                     <a:bodyPr/>
@@ -8372,7 +8372,7 @@
                   </a:tcPr>
                 </a:tc>
               </a:tr>
-              <a:tr h="528320">
+              <a:tr h="511810">
                 <a:tc>
                   <a:txBody>
                     <a:bodyPr/>
@@ -8510,7 +8510,7 @@
                   </a:tcPr>
                 </a:tc>
               </a:tr>
-              <a:tr h="528320">
+              <a:tr h="511810">
                 <a:tc>
                   <a:txBody>
                     <a:bodyPr/>
@@ -8648,7 +8648,7 @@
                   </a:tcPr>
                 </a:tc>
               </a:tr>
-              <a:tr h="528320">
+              <a:tr h="511810">
                 <a:tc>
                   <a:txBody>
                     <a:bodyPr/>
@@ -9027,7 +9027,7 @@
           </p:nvPr>
         </p:nvGraphicFramePr>
         <p:xfrm>
-          <a:off x="1065276" y="2712720"/>
+          <a:off x="1065276" y="2739390"/>
           <a:ext cx="10058400" cy="914400"/>
         </p:xfrm>
         <a:graphic>
@@ -9038,7 +9038,7 @@
                 <a:gridCol w="2514600"/>
                 <a:gridCol w="7543800"/>
               </a:tblGrid>
-              <a:tr h="568960">
+              <a:tr h="551180">
                 <a:tc>
                   <a:txBody>
                     <a:bodyPr/>
@@ -9176,7 +9176,7 @@
                   </a:tcPr>
                 </a:tc>
               </a:tr>
-              <a:tr h="568960">
+              <a:tr h="551180">
                 <a:tc>
                   <a:txBody>
                     <a:bodyPr/>
@@ -9314,7 +9314,7 @@
                   </a:tcPr>
                 </a:tc>
               </a:tr>
-              <a:tr h="568960">
+              <a:tr h="551180">
                 <a:tc>
                   <a:txBody>
                     <a:bodyPr/>
@@ -10898,7 +10898,7 @@
           </p:nvPr>
         </p:nvGraphicFramePr>
         <p:xfrm>
-          <a:off x="1522476" y="2143760"/>
+          <a:off x="1522476" y="2188210"/>
           <a:ext cx="9144000" cy="914400"/>
         </p:xfrm>
         <a:graphic>
@@ -10909,7 +10909,7 @@
                 <a:gridCol w="2286000"/>
                 <a:gridCol w="6858000"/>
               </a:tblGrid>
-              <a:tr h="568960">
+              <a:tr h="551180">
                 <a:tc>
                   <a:txBody>
                     <a:bodyPr/>
@@ -11047,7 +11047,7 @@
                   </a:tcPr>
                 </a:tc>
               </a:tr>
-              <a:tr h="568960">
+              <a:tr h="551180">
                 <a:tc>
                   <a:txBody>
                     <a:bodyPr/>
@@ -11185,7 +11185,7 @@
                   </a:tcPr>
                 </a:tc>
               </a:tr>
-              <a:tr h="568960">
+              <a:tr h="551180">
                 <a:tc>
                   <a:txBody>
                     <a:bodyPr/>
@@ -11323,7 +11323,7 @@
                   </a:tcPr>
                 </a:tc>
               </a:tr>
-              <a:tr h="568960">
+              <a:tr h="551180">
                 <a:tc>
                   <a:txBody>
                     <a:bodyPr/>
@@ -11461,7 +11461,7 @@
                   </a:tcPr>
                 </a:tc>
               </a:tr>
-              <a:tr h="568960">
+              <a:tr h="551180">
                 <a:tc>
                   <a:txBody>
                     <a:bodyPr/>
@@ -12222,12 +12222,12 @@
         </p:nvSpPr>
         <p:spPr>
           <a:xfrm>
-            <a:off x="548640" y="5349240"/>
-            <a:ext cx="11091672" cy="868680"/>
+            <a:off x="548640" y="4959096"/>
+            <a:ext cx="11091672" cy="1258824"/>
           </a:xfrm>
           <a:prstGeom prst="roundRect">
             <a:avLst>
-              <a:gd name="adj" fmla="val 12632"/>
+              <a:gd name="adj" fmla="val 8717"/>
             </a:avLst>
           </a:prstGeom>
           <a:solidFill>
@@ -12249,8 +12249,8 @@
         </p:nvSpPr>
         <p:spPr>
           <a:xfrm>
-            <a:off x="822960" y="5486400"/>
-            <a:ext cx="10543032" cy="594360"/>
+            <a:off x="822960" y="5096256"/>
+            <a:ext cx="10543032" cy="984504"/>
           </a:xfrm>
           <a:prstGeom prst="rect">
             <a:avLst/>
@@ -12298,7 +12298,7 @@
           </p:nvPr>
         </p:nvGraphicFramePr>
         <p:xfrm>
-          <a:off x="2894076" y="2103120"/>
+          <a:off x="2894076" y="2071878"/>
           <a:ext cx="6400800" cy="914400"/>
         </p:xfrm>
         <a:graphic>
@@ -12309,7 +12309,7 @@
                 <a:gridCol w="1920240"/>
                 <a:gridCol w="4480560"/>
               </a:tblGrid>
-              <a:tr h="487680">
+              <a:tr h="433070">
                 <a:tc>
                   <a:txBody>
                     <a:bodyPr/>
@@ -12319,7 +12319,7 @@
                         <a:buNone/>
                       </a:pPr>
                       <a:r>
-                        <a:rPr lang="en-US" sz="2400" b="1" dirty="0">
+                        <a:rPr lang="en-US" sz="2200" b="1" dirty="0">
                           <a:solidFill>
                             <a:srgbClr val="1F2937"/>
                           </a:solidFill>
@@ -12329,7 +12329,7 @@
                         </a:rPr>
                         <a:t>시간</a:t>
                       </a:r>
-                      <a:endParaRPr lang="en-US" sz="2400" dirty="0">
+                      <a:endParaRPr lang="en-US" sz="2200" dirty="0">
                         <a:latin typeface="맑은 고딕" charset="0"/>
                         <a:ea typeface="맑은 고딕" charset="0"/>
                         <a:cs typeface="맑은 고딕" charset="0"/>
@@ -12387,7 +12387,7 @@
                         <a:buNone/>
                       </a:pPr>
                       <a:r>
-                        <a:rPr lang="en-US" sz="2400" b="1" dirty="0">
+                        <a:rPr lang="en-US" sz="2200" b="1" dirty="0">
                           <a:solidFill>
                             <a:srgbClr val="1F2937"/>
                           </a:solidFill>
@@ -12397,7 +12397,7 @@
                         </a:rPr>
                         <a:t>장면</a:t>
                       </a:r>
-                      <a:endParaRPr lang="en-US" sz="2400" dirty="0">
+                      <a:endParaRPr lang="en-US" sz="2200" dirty="0">
                         <a:latin typeface="맑은 고딕" charset="0"/>
                         <a:ea typeface="맑은 고딕" charset="0"/>
                         <a:cs typeface="맑은 고딕" charset="0"/>
@@ -12447,7 +12447,7 @@
                   </a:tcPr>
                 </a:tc>
               </a:tr>
-              <a:tr h="487680">
+              <a:tr h="433070">
                 <a:tc>
                   <a:txBody>
                     <a:bodyPr/>
@@ -12457,7 +12457,7 @@
                         <a:buNone/>
                       </a:pPr>
                       <a:r>
-                        <a:rPr lang="en-US" sz="2400" dirty="0">
+                        <a:rPr lang="en-US" sz="2200" dirty="0">
                           <a:solidFill>
                             <a:srgbClr val="1F2937"/>
                           </a:solidFill>
@@ -12467,7 +12467,7 @@
                         </a:rPr>
                         <a:t>0:00</a:t>
                       </a:r>
-                      <a:endParaRPr lang="en-US" sz="2400" dirty="0">
+                      <a:endParaRPr lang="en-US" sz="2200" dirty="0">
                         <a:latin typeface="맑은 고딕" charset="0"/>
                         <a:ea typeface="맑은 고딕" charset="0"/>
                         <a:cs typeface="맑은 고딕" charset="0"/>
@@ -12525,7 +12525,7 @@
                         <a:buNone/>
                       </a:pPr>
                       <a:r>
-                        <a:rPr lang="en-US" sz="2400" dirty="0">
+                        <a:rPr lang="en-US" sz="2200" dirty="0">
                           <a:solidFill>
                             <a:srgbClr val="1F2937"/>
                           </a:solidFill>
@@ -12535,7 +12535,7 @@
                         </a:rPr>
                         <a:t>인사</a:t>
                       </a:r>
-                      <a:endParaRPr lang="en-US" sz="2400" dirty="0">
+                      <a:endParaRPr lang="en-US" sz="2200" dirty="0">
                         <a:latin typeface="맑은 고딕" charset="0"/>
                         <a:ea typeface="맑은 고딕" charset="0"/>
                         <a:cs typeface="맑은 고딕" charset="0"/>
@@ -12585,7 +12585,7 @@
                   </a:tcPr>
                 </a:tc>
               </a:tr>
-              <a:tr h="487680">
+              <a:tr h="433070">
                 <a:tc>
                   <a:txBody>
                     <a:bodyPr/>
@@ -12595,7 +12595,7 @@
                         <a:buNone/>
                       </a:pPr>
                       <a:r>
-                        <a:rPr lang="en-US" sz="2400" dirty="0">
+                        <a:rPr lang="en-US" sz="2200" dirty="0">
                           <a:solidFill>
                             <a:srgbClr val="1F2937"/>
                           </a:solidFill>
@@ -12605,7 +12605,7 @@
                         </a:rPr>
                         <a:t>0:20</a:t>
                       </a:r>
-                      <a:endParaRPr lang="en-US" sz="2400" dirty="0">
+                      <a:endParaRPr lang="en-US" sz="2200" dirty="0">
                         <a:latin typeface="맑은 고딕" charset="0"/>
                         <a:ea typeface="맑은 고딕" charset="0"/>
                         <a:cs typeface="맑은 고딕" charset="0"/>
@@ -12663,7 +12663,7 @@
                         <a:buNone/>
                       </a:pPr>
                       <a:r>
-                        <a:rPr lang="en-US" sz="2400" dirty="0">
+                        <a:rPr lang="en-US" sz="2200" dirty="0">
                           <a:solidFill>
                             <a:srgbClr val="1F2937"/>
                           </a:solidFill>
@@ -12673,7 +12673,7 @@
                         </a:rPr>
                         <a:t>준비물 알아보기</a:t>
                       </a:r>
-                      <a:endParaRPr lang="en-US" sz="2400" dirty="0">
+                      <a:endParaRPr lang="en-US" sz="2200" dirty="0">
                         <a:latin typeface="맑은 고딕" charset="0"/>
                         <a:ea typeface="맑은 고딕" charset="0"/>
                         <a:cs typeface="맑은 고딕" charset="0"/>
@@ -12723,7 +12723,7 @@
                   </a:tcPr>
                 </a:tc>
               </a:tr>
-              <a:tr h="487680">
+              <a:tr h="433070">
                 <a:tc>
                   <a:txBody>
                     <a:bodyPr/>
@@ -12733,7 +12733,7 @@
                         <a:buNone/>
                       </a:pPr>
                       <a:r>
-                        <a:rPr lang="en-US" sz="2400" dirty="0">
+                        <a:rPr lang="en-US" sz="2200" dirty="0">
                           <a:solidFill>
                             <a:srgbClr val="1F2937"/>
                           </a:solidFill>
@@ -12743,7 +12743,7 @@
                         </a:rPr>
                         <a:t>1:00</a:t>
                       </a:r>
-                      <a:endParaRPr lang="en-US" sz="2400" dirty="0">
+                      <a:endParaRPr lang="en-US" sz="2200" dirty="0">
                         <a:latin typeface="맑은 고딕" charset="0"/>
                         <a:ea typeface="맑은 고딕" charset="0"/>
                         <a:cs typeface="맑은 고딕" charset="0"/>
@@ -12801,7 +12801,7 @@
                         <a:buNone/>
                       </a:pPr>
                       <a:r>
-                        <a:rPr lang="en-US" sz="2400" dirty="0">
+                        <a:rPr lang="en-US" sz="2200" dirty="0">
                           <a:solidFill>
                             <a:srgbClr val="1F2937"/>
                           </a:solidFill>
@@ -12811,7 +12811,7 @@
                         </a:rPr>
                         <a:t>만드는 순서</a:t>
                       </a:r>
-                      <a:endParaRPr lang="en-US" sz="2400" dirty="0">
+                      <a:endParaRPr lang="en-US" sz="2200" dirty="0">
                         <a:latin typeface="맑은 고딕" charset="0"/>
                         <a:ea typeface="맑은 고딕" charset="0"/>
                         <a:cs typeface="맑은 고딕" charset="0"/>
@@ -12861,7 +12861,7 @@
                   </a:tcPr>
                 </a:tc>
               </a:tr>
-              <a:tr h="487680">
+              <a:tr h="433070">
                 <a:tc>
                   <a:txBody>
                     <a:bodyPr/>
@@ -12871,7 +12871,7 @@
                         <a:buNone/>
                       </a:pPr>
                       <a:r>
-                        <a:rPr lang="en-US" sz="2400" dirty="0">
+                        <a:rPr lang="en-US" sz="2200" dirty="0">
                           <a:solidFill>
                             <a:srgbClr val="1F2937"/>
                           </a:solidFill>
@@ -12881,7 +12881,7 @@
                         </a:rPr>
                         <a:t>3:10</a:t>
                       </a:r>
-                      <a:endParaRPr lang="en-US" sz="2400" dirty="0">
+                      <a:endParaRPr lang="en-US" sz="2200" dirty="0">
                         <a:latin typeface="맑은 고딕" charset="0"/>
                         <a:ea typeface="맑은 고딕" charset="0"/>
                         <a:cs typeface="맑은 고딕" charset="0"/>
@@ -12939,7 +12939,7 @@
                         <a:buNone/>
                       </a:pPr>
                       <a:r>
-                        <a:rPr lang="en-US" sz="2400" dirty="0">
+                        <a:rPr lang="en-US" sz="2200" dirty="0">
                           <a:solidFill>
                             <a:srgbClr val="1F2937"/>
                           </a:solidFill>
@@ -12949,7 +12949,7 @@
                         </a:rPr>
                         <a:t>소리 들어 보기</a:t>
                       </a:r>
-                      <a:endParaRPr lang="en-US" sz="2400" dirty="0">
+                      <a:endParaRPr lang="en-US" sz="2200" dirty="0">
                         <a:latin typeface="맑은 고딕" charset="0"/>
                         <a:ea typeface="맑은 고딕" charset="0"/>
                         <a:cs typeface="맑은 고딕" charset="0"/>
@@ -12999,7 +12999,7 @@
                   </a:tcPr>
                 </a:tc>
               </a:tr>
-              <a:tr h="487680">
+              <a:tr h="433070">
                 <a:tc>
                   <a:txBody>
                     <a:bodyPr/>
@@ -13009,7 +13009,7 @@
                         <a:buNone/>
                       </a:pPr>
                       <a:r>
-                        <a:rPr lang="en-US" sz="2400" dirty="0">
+                        <a:rPr lang="en-US" sz="2200" dirty="0">
                           <a:solidFill>
                             <a:srgbClr val="1F2937"/>
                           </a:solidFill>
@@ -13019,7 +13019,7 @@
                         </a:rPr>
                         <a:t>4:00</a:t>
                       </a:r>
-                      <a:endParaRPr lang="en-US" sz="2400" dirty="0">
+                      <a:endParaRPr lang="en-US" sz="2200" dirty="0">
                         <a:latin typeface="맑은 고딕" charset="0"/>
                         <a:ea typeface="맑은 고딕" charset="0"/>
                         <a:cs typeface="맑은 고딕" charset="0"/>
@@ -13077,7 +13077,7 @@
                         <a:buNone/>
                       </a:pPr>
                       <a:r>
-                        <a:rPr lang="en-US" sz="2400" dirty="0">
+                        <a:rPr lang="en-US" sz="2200" dirty="0">
                           <a:solidFill>
                             <a:srgbClr val="1F2937"/>
                           </a:solidFill>
@@ -13087,7 +13087,7 @@
                         </a:rPr>
                         <a:t>정리하기</a:t>
                       </a:r>
-                      <a:endParaRPr lang="en-US" sz="2400" dirty="0">
+                      <a:endParaRPr lang="en-US" sz="2200" dirty="0">
                         <a:latin typeface="맑은 고딕" charset="0"/>
                         <a:ea typeface="맑은 고딕" charset="0"/>
                         <a:cs typeface="맑은 고딕" charset="0"/>
